--- a/Foundation_F6/Workshop/F6-W04_Apply_Workshop_L07-L08_A_Heritage_Walking_Tour.pptx
+++ b/Foundation_F6/Workshop/F6-W04_Apply_Workshop_L07-L08_A_Heritage_Walking_Tour.pptx
@@ -6277,6 +6277,19 @@
               <a:buNone/>
             </a:pPr>
             <a:r>
+              <a:rPr lang="en-US" sz="1100" dirty="0">
+                <a:solidFill>
+                  <a:srgbClr val="5A6472"/>
+                </a:solidFill>
+                <a:latin typeface="Calibri" pitchFamily="34" charset="0"/>
+                <a:cs typeface="Amiri" pitchFamily="2" charset="-78"/>
+              </a:rPr>
+              <a:t>‏</a:t>
+            </a:r>
+            <a:pPr algn="l" indent="0" marL="0">
+              <a:buNone/>
+            </a:pPr>
+            <a:r>
               <a:rPr lang="ar-SA" altLang="en-US" sz="1450" dirty="0">
                 <a:solidFill>
                   <a:srgbClr val="5A6472"/>
@@ -6298,7 +6311,7 @@
                 <a:latin typeface="Calibri" pitchFamily="34" charset="0"/>
                 <a:cs typeface="Amiri" pitchFamily="2" charset="-78"/>
               </a:rPr>
-              <a:t> (to a boy)</a:t>
+              <a:t>‏ (to a boy)</a:t>
             </a:r>
             <a:endParaRPr lang="en-US" sz="1100" dirty="0"/>
           </a:p>
@@ -6860,6 +6873,19 @@
               <a:buNone/>
             </a:pPr>
             <a:r>
+              <a:rPr lang="en-US" sz="1100" dirty="0">
+                <a:solidFill>
+                  <a:srgbClr val="5A6472"/>
+                </a:solidFill>
+                <a:latin typeface="Calibri" pitchFamily="34" charset="0"/>
+                <a:cs typeface="Amiri" pitchFamily="2" charset="-78"/>
+              </a:rPr>
+              <a:t>‏</a:t>
+            </a:r>
+            <a:pPr algn="l" indent="0" marL="0">
+              <a:buNone/>
+            </a:pPr>
+            <a:r>
               <a:rPr lang="ar-SA" altLang="en-US" sz="1450" dirty="0">
                 <a:solidFill>
                   <a:srgbClr val="5A6472"/>
@@ -6881,7 +6907,7 @@
                 <a:latin typeface="Calibri" pitchFamily="34" charset="0"/>
                 <a:cs typeface="Amiri" pitchFamily="2" charset="-78"/>
               </a:rPr>
-              <a:t> (to a girl)</a:t>
+              <a:t>‏ (to a girl)</a:t>
             </a:r>
             <a:endParaRPr lang="en-US" sz="1100" dirty="0"/>
           </a:p>
@@ -7378,6 +7404,19 @@
               <a:buNone/>
             </a:pPr>
             <a:r>
+              <a:rPr lang="en-US" sz="1100" dirty="0">
+                <a:solidFill>
+                  <a:srgbClr val="5A6472"/>
+                </a:solidFill>
+                <a:latin typeface="Calibri" pitchFamily="34" charset="0"/>
+                <a:cs typeface="Amiri" pitchFamily="2" charset="-78"/>
+              </a:rPr>
+              <a:t>‏</a:t>
+            </a:r>
+            <a:pPr algn="l" indent="0" marL="0">
+              <a:buNone/>
+            </a:pPr>
+            <a:r>
               <a:rPr lang="ar-SA" altLang="en-US" sz="1450" dirty="0">
                 <a:solidFill>
                   <a:srgbClr val="5A6472"/>
@@ -7399,7 +7438,7 @@
                 <a:latin typeface="Calibri" pitchFamily="34" charset="0"/>
                 <a:cs typeface="Amiri" pitchFamily="2" charset="-78"/>
               </a:rPr>
-              <a:t> (to a group)</a:t>
+              <a:t>‏ (to a group)</a:t>
             </a:r>
             <a:endParaRPr lang="en-US" sz="1100" dirty="0"/>
           </a:p>
@@ -7475,7 +7514,7 @@
                 <a:latin typeface="Calibri" pitchFamily="34" charset="0"/>
                 <a:cs typeface="Amiri" pitchFamily="2" charset="-78"/>
               </a:rPr>
-              <a:t>Odd numbers come from F6-L07, even numbers from F6-L08. Core: a full sentence from the starter. Develop: add the “more” part. Stretch: link two answers with </a:t>
+              <a:t>Odd numbers come from F6-L07, even numbers from F6-L08. Core: a full sentence from the starter. Develop: add the “more” part. Stretch: link two answers with ‏</a:t>
             </a:r>
             <a:pPr algn="l" indent="0" marL="0">
               <a:buNone/>
@@ -7502,7 +7541,7 @@
                 <a:latin typeface="Calibri" pitchFamily="34" charset="0"/>
                 <a:cs typeface="Amiri" pitchFamily="2" charset="-78"/>
               </a:rPr>
-              <a:t>, </a:t>
+              <a:t>‏, ‏</a:t>
             </a:r>
             <a:pPr algn="l" indent="0" marL="0">
               <a:buNone/>
@@ -7529,7 +7568,7 @@
                 <a:latin typeface="Calibri" pitchFamily="34" charset="0"/>
                 <a:cs typeface="Amiri" pitchFamily="2" charset="-78"/>
               </a:rPr>
-              <a:t> or </a:t>
+              <a:t>‏ or ‏</a:t>
             </a:r>
             <a:pPr algn="l" indent="0" marL="0">
               <a:buNone/>
@@ -7556,7 +7595,7 @@
                 <a:latin typeface="Calibri" pitchFamily="34" charset="0"/>
                 <a:cs typeface="Amiri" pitchFamily="2" charset="-78"/>
               </a:rPr>
-              <a:t>. Swap after each question.</a:t>
+              <a:t>‏. Swap after each question.</a:t>
             </a:r>
             <a:endParaRPr lang="en-US" sz="1100" dirty="0"/>
           </a:p>
@@ -9068,7 +9107,7 @@
                 <a:latin typeface="Calibri" pitchFamily="34" charset="0"/>
                 <a:cs typeface="Amiri" pitchFamily="2" charset="-78"/>
               </a:rPr>
-              <a:t>Compare with </a:t>
+              <a:t>Compare with ‏</a:t>
             </a:r>
             <a:pPr algn="l" indent="0" marL="0">
               <a:buNone/>
@@ -9095,7 +9134,7 @@
                 <a:latin typeface="Calibri" pitchFamily="34" charset="0"/>
                 <a:cs typeface="Amiri" pitchFamily="2" charset="-78"/>
               </a:rPr>
-              <a:t>.</a:t>
+              <a:t>‏.</a:t>
             </a:r>
             <a:endParaRPr lang="en-US" sz="1100" dirty="0"/>
           </a:p>
@@ -10189,7 +10228,7 @@
                 <a:latin typeface="Calibri" pitchFamily="34" charset="0"/>
                 <a:cs typeface="Amiri" pitchFamily="2" charset="-78"/>
               </a:rPr>
-              <a:t>Talk for 30–45 seconds as a tour guide in your town (or a city you know): describe an old building and a new one (what they are built of, two adjectives each, a comparison with </a:t>
+              <a:t>Talk for 30–45 seconds as a tour guide in your town (or a city you know): describe an old building and a new one (what they are built of, two adjectives each, a comparison with ‏</a:t>
             </a:r>
             <a:pPr algn="l" indent="0" marL="0">
               <a:buNone/>
@@ -10216,7 +10255,7 @@
                 <a:latin typeface="Calibri" pitchFamily="34" charset="0"/>
                 <a:cs typeface="Amiri" pitchFamily="2" charset="-78"/>
               </a:rPr>
-              <a:t>), then give the group directions from one to the other.</a:t>
+              <a:t>‏), then give the group directions from one to the other.</a:t>
             </a:r>
             <a:endParaRPr lang="en-US" sz="1350" dirty="0"/>
           </a:p>
@@ -11070,7 +11109,7 @@
                 <a:latin typeface="Calibri" pitchFamily="34" charset="0"/>
                 <a:cs typeface="Amiri" pitchFamily="2" charset="-78"/>
               </a:rPr>
-              <a:t>Add </a:t>
+              <a:t>Add ‏</a:t>
             </a:r>
             <a:pPr algn="l" indent="0" marL="0">
               <a:buNone/>
@@ -11097,7 +11136,7 @@
                 <a:latin typeface="Calibri" pitchFamily="34" charset="0"/>
                 <a:cs typeface="Amiri" pitchFamily="2" charset="-78"/>
               </a:rPr>
-              <a:t>, a sign (</a:t>
+              <a:t>‏, a sign (‏</a:t>
             </a:r>
             <a:pPr algn="l" indent="0" marL="0">
               <a:buNone/>
@@ -11178,7 +11217,7 @@
                 <a:latin typeface="Calibri" pitchFamily="34" charset="0"/>
                 <a:cs typeface="Amiri" pitchFamily="2" charset="-78"/>
               </a:rPr>
-              <a:t>) and which building you prefer.</a:t>
+              <a:t>‏) and which building you prefer.</a:t>
             </a:r>
             <a:endParaRPr lang="en-US" sz="1150" dirty="0"/>
           </a:p>
@@ -17553,7 +17592,7 @@
                 <a:latin typeface="Calibri" pitchFamily="34" charset="0"/>
                 <a:cs typeface="Amiri" pitchFamily="2" charset="-78"/>
               </a:rPr>
-              <a:t>Feminine → </a:t>
+              <a:t>Feminine → ‏</a:t>
             </a:r>
             <a:pPr algn="l" indent="0" marL="0">
               <a:buNone/>
@@ -17580,7 +17619,7 @@
                 <a:latin typeface="Calibri" pitchFamily="34" charset="0"/>
                 <a:cs typeface="Amiri" pitchFamily="2" charset="-78"/>
               </a:rPr>
-              <a:t>.</a:t>
+              <a:t>‏.</a:t>
             </a:r>
             <a:endParaRPr lang="en-US" sz="1150" dirty="0"/>
           </a:p>
@@ -20050,7 +20089,7 @@
                 <a:latin typeface="Calibri" pitchFamily="34" charset="0"/>
                 <a:cs typeface="Amiri" pitchFamily="2" charset="-78"/>
               </a:rPr>
-              <a:t>Write a tour leaflet (about 45–65 words) for visitors. Include: • an old building: what it is, what it is built of, two adjectives • a modern building: the same • a comparison with </a:t>
+              <a:t>Write a tour leaflet (about 45–65 words) for visitors. Include: • an old building: what it is, what it is built of, two adjectives • a modern building: the same • a comparison with ‏</a:t>
             </a:r>
             <a:pPr algn="l" indent="0" marL="0">
               <a:buNone/>
@@ -20077,7 +20116,7 @@
                 <a:latin typeface="Calibri" pitchFamily="34" charset="0"/>
                 <a:cs typeface="Amiri" pitchFamily="2" charset="-78"/>
               </a:rPr>
-              <a:t> • directions for the group from the first to the second (at least four steps with group commands) • one sign they will see • which building you prefer and why.</a:t>
+              <a:t>‏ • directions for the group from the first to the second (at least four steps with group commands) • one sign they will see • which building you prefer and why.</a:t>
             </a:r>
             <a:endParaRPr lang="en-US" sz="1100" dirty="0"/>
           </a:p>
@@ -20229,7 +20268,7 @@
                 <a:latin typeface="Calibri" pitchFamily="34" charset="0"/>
                 <a:cs typeface="Amiri" pitchFamily="2" charset="-78"/>
               </a:rPr>
-              <a:t>☐  At least one </a:t>
+              <a:t>☐  At least one ‏</a:t>
             </a:r>
             <a:pPr algn="l" indent="0" marL="0">
               <a:buNone/>
@@ -20256,7 +20295,7 @@
                 <a:latin typeface="Calibri" pitchFamily="34" charset="0"/>
                 <a:cs typeface="Amiri" pitchFamily="2" charset="-78"/>
               </a:rPr>
-              <a:t> and one </a:t>
+              <a:t>‏ and one ‏</a:t>
             </a:r>
             <a:pPr algn="l" indent="0" marL="0">
               <a:buNone/>
@@ -20283,7 +20322,7 @@
                 <a:latin typeface="Calibri" pitchFamily="34" charset="0"/>
                 <a:cs typeface="Amiri" pitchFamily="2" charset="-78"/>
               </a:rPr>
-              <a:t> (Develop).</a:t>
+              <a:t>‏ (Develop).</a:t>
             </a:r>
             <a:endParaRPr lang="en-US" sz="1200" dirty="0"/>
           </a:p>
@@ -23607,7 +23646,7 @@
                 <a:latin typeface="Calibri" pitchFamily="34" charset="0"/>
                 <a:cs typeface="Amiri" pitchFamily="2" charset="-78"/>
               </a:rPr>
-              <a:t>use </a:t>
+              <a:t>use ‏</a:t>
             </a:r>
             <a:pPr algn="l" indent="0" marL="0">
               <a:buNone/>
@@ -23634,7 +23673,7 @@
                 <a:latin typeface="Calibri" pitchFamily="34" charset="0"/>
                 <a:cs typeface="Amiri" pitchFamily="2" charset="-78"/>
               </a:rPr>
-              <a:t> correctly?</a:t>
+              <a:t>‏ correctly?</a:t>
             </a:r>
             <a:endParaRPr lang="en-US" sz="1100" dirty="0"/>
           </a:p>
@@ -24017,7 +24056,7 @@
                 <a:latin typeface="Calibri" pitchFamily="34" charset="0"/>
                 <a:cs typeface="Amiri" pitchFamily="2" charset="-78"/>
               </a:rPr>
-              <a:t>use linking words (</a:t>
+              <a:t>use linking words (‏</a:t>
             </a:r>
             <a:pPr algn="l" indent="0" marL="0">
               <a:buNone/>
@@ -24125,7 +24164,7 @@
                 <a:latin typeface="Calibri" pitchFamily="34" charset="0"/>
                 <a:cs typeface="Amiri" pitchFamily="2" charset="-78"/>
               </a:rPr>
-              <a:t>)?</a:t>
+              <a:t>‏)?</a:t>
             </a:r>
             <a:endParaRPr lang="en-US" sz="1100" dirty="0"/>
           </a:p>
@@ -28071,7 +28110,7 @@
                 <a:latin typeface="Calibri" pitchFamily="34" charset="0"/>
                 <a:cs typeface="Amiri" pitchFamily="2" charset="-78"/>
               </a:rPr>
-              <a:t>I added reasons (</a:t>
+              <a:t>I added reasons (‏</a:t>
             </a:r>
             <a:pPr algn="l" indent="0" marL="0">
               <a:buNone/>
@@ -28098,7 +28137,7 @@
                 <a:latin typeface="Calibri" pitchFamily="34" charset="0"/>
                 <a:cs typeface="Amiri" pitchFamily="2" charset="-78"/>
               </a:rPr>
-              <a:t>) and extra details without frames.</a:t>
+              <a:t>‏) and extra details without frames.</a:t>
             </a:r>
             <a:endParaRPr lang="en-US" sz="1300" dirty="0"/>
           </a:p>
@@ -32226,7 +32265,7 @@
                 <a:latin typeface="Calibri" pitchFamily="34" charset="0"/>
                 <a:cs typeface="Amiri" pitchFamily="2" charset="-78"/>
               </a:rPr>
-              <a:t>☐  Add a reason (</a:t>
+              <a:t>☐  Add a reason (‏</a:t>
             </a:r>
             <a:pPr algn="l" indent="0" marL="0">
               <a:buNone/>
@@ -32253,7 +32292,7 @@
                 <a:latin typeface="Calibri" pitchFamily="34" charset="0"/>
                 <a:cs typeface="Amiri" pitchFamily="2" charset="-78"/>
               </a:rPr>
-              <a:t>) and an extra detail to every point.</a:t>
+              <a:t>‏) and an extra detail to every point.</a:t>
             </a:r>
             <a:endParaRPr lang="en-US" sz="1300" dirty="0"/>
           </a:p>
@@ -33774,7 +33813,7 @@
                 <a:latin typeface="Calibri" pitchFamily="34" charset="0"/>
                 <a:cs typeface="Amiri" pitchFamily="2" charset="-78"/>
               </a:rPr>
-              <a:t>Join a word from each lesson in one sentence with </a:t>
+              <a:t>Join a word from each lesson in one sentence with ‏</a:t>
             </a:r>
             <a:pPr algn="l" indent="0" marL="0">
               <a:buNone/>
@@ -33801,7 +33840,7 @@
                 <a:latin typeface="Calibri" pitchFamily="34" charset="0"/>
                 <a:cs typeface="Amiri" pitchFamily="2" charset="-78"/>
               </a:rPr>
-              <a:t> or </a:t>
+              <a:t>‏ or ‏</a:t>
             </a:r>
             <a:pPr algn="l" indent="0" marL="0">
               <a:buNone/>
@@ -33828,7 +33867,7 @@
                 <a:latin typeface="Calibri" pitchFamily="34" charset="0"/>
                 <a:cs typeface="Amiri" pitchFamily="2" charset="-78"/>
               </a:rPr>
-              <a:t>.</a:t>
+              <a:t>‏.</a:t>
             </a:r>
             <a:endParaRPr lang="en-US" sz="1150" dirty="0"/>
           </a:p>
